--- a/artifacts/llm-before-after/mdpr-before-executive.pptx
+++ b/artifacts/llm-before-after/mdpr-before-executive.pptx
@@ -1907,8 +1907,8 @@
         </p:nvSpPr>
         <p:spPr>
           <a:xfrm>
-            <a:off x="914400" y="1463040"/>
-            <a:ext cx="10241280" cy="73152"/>
+            <a:off x="822960" y="1572768"/>
+            <a:ext cx="6629400" cy="73152"/>
           </a:xfrm>
           <a:prstGeom prst="rect">
             <a:avLst/>
@@ -1928,7 +1928,180 @@
       </p:sp>
       <p:sp>
         <p:nvSpPr>
-          <p:cNvPr id="6" name="Text 4"/>
+          <p:cNvPr id="6" name="Shape 4"/>
+          <p:cNvSpPr/>
+          <p:nvPr/>
+        </p:nvSpPr>
+        <p:spPr>
+          <a:xfrm>
+            <a:off x="7955280" y="1993392"/>
+            <a:ext cx="2139696" cy="2139696"/>
+          </a:xfrm>
+          <a:prstGeom prst="roundRect">
+            <a:avLst>
+              <a:gd name="adj" fmla="val 3419"/>
+            </a:avLst>
+          </a:prstGeom>
+          <a:solidFill>
+            <a:srgbClr val="FBFCFD"/>
+          </a:solidFill>
+          <a:ln w="12700">
+            <a:solidFill>
+              <a:srgbClr val="BDCAE0"/>
+            </a:solidFill>
+            <a:prstDash val="solid"/>
+          </a:ln>
+          <a:effectLst>
+            <a:outerShdw sx="100000" sy="100000" kx="0" ky="0" algn="bl" rotWithShape="0" blurRad="12700" dist="50800" dir="2700000">
+              <a:srgbClr val="000000">
+                <a:alpha val="8000"/>
+              </a:srgbClr>
+            </a:outerShdw>
+          </a:effectLst>
+        </p:spPr>
+      </p:sp>
+      <p:sp>
+        <p:nvSpPr>
+          <p:cNvPr id="7" name="Shape 5"/>
+          <p:cNvSpPr/>
+          <p:nvPr/>
+        </p:nvSpPr>
+        <p:spPr>
+          <a:xfrm>
+            <a:off x="8511601" y="2464125"/>
+            <a:ext cx="575150" cy="742902"/>
+          </a:xfrm>
+          <a:prstGeom prst="roundRect">
+            <a:avLst>
+              <a:gd name="adj" fmla="val 6359"/>
+            </a:avLst>
+          </a:prstGeom>
+          <a:solidFill>
+            <a:srgbClr val="0F172A"/>
+          </a:solidFill>
+          <a:ln w="12700">
+            <a:solidFill>
+              <a:srgbClr val="0F172A">
+                <a:alpha val="0"/>
+              </a:srgbClr>
+            </a:solidFill>
+            <a:prstDash val="solid"/>
+          </a:ln>
+        </p:spPr>
+      </p:sp>
+      <p:sp>
+        <p:nvSpPr>
+          <p:cNvPr id="8" name="Shape 6"/>
+          <p:cNvSpPr/>
+          <p:nvPr/>
+        </p:nvSpPr>
+        <p:spPr>
+          <a:xfrm>
+            <a:off x="8655389" y="2655842"/>
+            <a:ext cx="299557" cy="41938"/>
+          </a:xfrm>
+          <a:prstGeom prst="rect">
+            <a:avLst/>
+          </a:prstGeom>
+          <a:solidFill>
+            <a:srgbClr val="FBFCFD"/>
+          </a:solidFill>
+          <a:ln w="12700">
+            <a:solidFill>
+              <a:srgbClr val="FBFCFD">
+                <a:alpha val="0"/>
+              </a:srgbClr>
+            </a:solidFill>
+            <a:prstDash val="solid"/>
+          </a:ln>
+        </p:spPr>
+      </p:sp>
+      <p:sp>
+        <p:nvSpPr>
+          <p:cNvPr id="9" name="Shape 7"/>
+          <p:cNvSpPr/>
+          <p:nvPr/>
+        </p:nvSpPr>
+        <p:spPr>
+          <a:xfrm>
+            <a:off x="8655389" y="2811612"/>
+            <a:ext cx="299557" cy="41938"/>
+          </a:xfrm>
+          <a:prstGeom prst="rect">
+            <a:avLst/>
+          </a:prstGeom>
+          <a:solidFill>
+            <a:srgbClr val="FBFCFD"/>
+          </a:solidFill>
+          <a:ln w="12700">
+            <a:solidFill>
+              <a:srgbClr val="FBFCFD">
+                <a:alpha val="0"/>
+              </a:srgbClr>
+            </a:solidFill>
+            <a:prstDash val="solid"/>
+          </a:ln>
+        </p:spPr>
+      </p:sp>
+      <p:sp>
+        <p:nvSpPr>
+          <p:cNvPr id="10" name="Shape 8"/>
+          <p:cNvSpPr/>
+          <p:nvPr/>
+        </p:nvSpPr>
+        <p:spPr>
+          <a:xfrm>
+            <a:off x="8655389" y="2967382"/>
+            <a:ext cx="299557" cy="41938"/>
+          </a:xfrm>
+          <a:prstGeom prst="rect">
+            <a:avLst/>
+          </a:prstGeom>
+          <a:solidFill>
+            <a:srgbClr val="FBFCFD"/>
+          </a:solidFill>
+          <a:ln w="12700">
+            <a:solidFill>
+              <a:srgbClr val="FBFCFD">
+                <a:alpha val="0"/>
+              </a:srgbClr>
+            </a:solidFill>
+            <a:prstDash val="solid"/>
+          </a:ln>
+        </p:spPr>
+      </p:sp>
+      <p:sp>
+        <p:nvSpPr>
+          <p:cNvPr id="11" name="Shape 9"/>
+          <p:cNvSpPr/>
+          <p:nvPr/>
+        </p:nvSpPr>
+        <p:spPr>
+          <a:xfrm>
+            <a:off x="822960" y="1572768"/>
+            <a:ext cx="6629400" cy="3310128"/>
+          </a:xfrm>
+          <a:prstGeom prst="roundRect">
+            <a:avLst>
+              <a:gd name="adj" fmla="val 1657"/>
+            </a:avLst>
+          </a:prstGeom>
+          <a:solidFill>
+            <a:srgbClr val="FBFCFD"/>
+          </a:solidFill>
+          <a:ln w="12700">
+            <a:solidFill>
+              <a:srgbClr val="BDCAE0">
+                <a:alpha val="90000"/>
+              </a:srgbClr>
+            </a:solidFill>
+            <a:prstDash val="solid"/>
+          </a:ln>
+        </p:spPr>
+      </p:sp>
+      <p:sp>
+        <p:nvSpPr>
+          <p:cNvPr id="12" name="Text 10"/>
           <p:cNvSpPr txBox="1"/>
           <p:nvPr/>
         </p:nvSpPr>
@@ -1972,14 +2145,14 @@
       </p:sp>
       <p:sp>
         <p:nvSpPr>
-          <p:cNvPr id="7" name="Text 5"/>
+          <p:cNvPr id="13" name="Text 11"/>
           <p:cNvSpPr txBox="1"/>
           <p:nvPr/>
         </p:nvSpPr>
         <p:spPr>
           <a:xfrm>
-            <a:off x="987552" y="1572768"/>
-            <a:ext cx="10094976" cy="4261104"/>
+            <a:off x="1115568" y="1773936"/>
+            <a:ext cx="6044184" cy="2907792"/>
           </a:xfrm>
           <a:prstGeom prst="rect">
             <a:avLst/>
@@ -1988,7 +2161,7 @@
           <a:ln/>
         </p:spPr>
         <p:txBody>
-          <a:bodyPr wrap="square" lIns="0" tIns="25400" rIns="25400" bIns="0" rtlCol="0" anchor="t">
+          <a:bodyPr wrap="square" lIns="0" tIns="25400" rIns="25400" bIns="0" rtlCol="0" anchor="ctr">
             <a:normAutofit/>
           </a:bodyPr>
           <a:lstStyle/>
@@ -2545,8 +2718,8 @@
         </p:nvSpPr>
         <p:spPr>
           <a:xfrm>
-            <a:off x="804672" y="2939796"/>
-            <a:ext cx="310896" cy="310896"/>
+            <a:off x="804672" y="2907975"/>
+            <a:ext cx="374538" cy="374538"/>
           </a:xfrm>
           <a:prstGeom prst="ellipse">
             <a:avLst/>
@@ -2572,8 +2745,8 @@
         </p:nvSpPr>
         <p:spPr>
           <a:xfrm>
-            <a:off x="804672" y="2939796"/>
-            <a:ext cx="310896" cy="310896"/>
+            <a:off x="804672" y="2907975"/>
+            <a:ext cx="374538" cy="374538"/>
           </a:xfrm>
           <a:prstGeom prst="rect">
             <a:avLst/>
@@ -2592,7 +2765,7 @@
               <a:buNone/>
             </a:pPr>
             <a:r>
-              <a:rPr lang="en-US" sz="1100" b="1" dirty="0">
+              <a:rPr lang="en-US" sz="1500" b="1" dirty="0">
                 <a:solidFill>
                   <a:srgbClr val="F8FAFC"/>
                 </a:solidFill>
@@ -2602,7 +2775,7 @@
               </a:rPr>
               <a:t>1</a:t>
             </a:r>
-            <a:endParaRPr lang="en-US" sz="1100" dirty="0"/>
+            <a:endParaRPr lang="en-US" sz="1500" dirty="0"/>
           </a:p>
         </p:txBody>
       </p:sp>
@@ -2614,8 +2787,8 @@
         </p:nvSpPr>
         <p:spPr>
           <a:xfrm>
-            <a:off x="1261872" y="2638044"/>
-            <a:ext cx="2648712" cy="914400"/>
+            <a:off x="1325514" y="2638044"/>
+            <a:ext cx="2585070" cy="914400"/>
           </a:xfrm>
           <a:prstGeom prst="rect">
             <a:avLst/>
@@ -2636,7 +2809,7 @@
               <a:buNone/>
             </a:pPr>
             <a:r>
-              <a:rPr lang="en-US" sz="1500" dirty="0">
+              <a:rPr lang="en-US" sz="1600" dirty="0">
                 <a:solidFill>
                   <a:srgbClr val="0F172A"/>
                 </a:solidFill>
@@ -2646,7 +2819,7 @@
               </a:rPr>
               <a:t>Source markdown</a:t>
             </a:r>
-            <a:endParaRPr lang="en-US" sz="1500" dirty="0"/>
+            <a:endParaRPr lang="en-US" sz="1600" dirty="0"/>
           </a:p>
         </p:txBody>
       </p:sp>
@@ -2719,8 +2892,8 @@
         </p:nvSpPr>
         <p:spPr>
           <a:xfrm>
-            <a:off x="4550664" y="2939796"/>
-            <a:ext cx="310896" cy="310896"/>
+            <a:off x="4550664" y="2907975"/>
+            <a:ext cx="374538" cy="374538"/>
           </a:xfrm>
           <a:prstGeom prst="ellipse">
             <a:avLst/>
@@ -2746,8 +2919,8 @@
         </p:nvSpPr>
         <p:spPr>
           <a:xfrm>
-            <a:off x="4550664" y="2939796"/>
-            <a:ext cx="310896" cy="310896"/>
+            <a:off x="4550664" y="2907975"/>
+            <a:ext cx="374538" cy="374538"/>
           </a:xfrm>
           <a:prstGeom prst="rect">
             <a:avLst/>
@@ -2766,7 +2939,7 @@
               <a:buNone/>
             </a:pPr>
             <a:r>
-              <a:rPr lang="en-US" sz="1100" b="1" dirty="0">
+              <a:rPr lang="en-US" sz="1500" b="1" dirty="0">
                 <a:solidFill>
                   <a:srgbClr val="F8FAFC"/>
                 </a:solidFill>
@@ -2776,7 +2949,7 @@
               </a:rPr>
               <a:t>2</a:t>
             </a:r>
-            <a:endParaRPr lang="en-US" sz="1100" dirty="0"/>
+            <a:endParaRPr lang="en-US" sz="1500" dirty="0"/>
           </a:p>
         </p:txBody>
       </p:sp>
@@ -2788,8 +2961,8 @@
         </p:nvSpPr>
         <p:spPr>
           <a:xfrm>
-            <a:off x="5007864" y="2638044"/>
-            <a:ext cx="2648712" cy="914400"/>
+            <a:off x="5071506" y="2638044"/>
+            <a:ext cx="2585070" cy="914400"/>
           </a:xfrm>
           <a:prstGeom prst="rect">
             <a:avLst/>
@@ -2810,7 +2983,7 @@
               <a:buNone/>
             </a:pPr>
             <a:r>
-              <a:rPr lang="en-US" sz="1500" dirty="0">
+              <a:rPr lang="en-US" sz="1600" dirty="0">
                 <a:solidFill>
                   <a:srgbClr val="0F172A"/>
                 </a:solidFill>
@@ -2820,7 +2993,7 @@
               </a:rPr>
               <a:t>MDPR parser</a:t>
             </a:r>
-            <a:endParaRPr lang="en-US" sz="1500" dirty="0"/>
+            <a:endParaRPr lang="en-US" sz="1600" dirty="0"/>
           </a:p>
         </p:txBody>
       </p:sp>
@@ -2893,8 +3066,8 @@
         </p:nvSpPr>
         <p:spPr>
           <a:xfrm>
-            <a:off x="8296656" y="2939796"/>
-            <a:ext cx="310896" cy="310896"/>
+            <a:off x="8296656" y="2907975"/>
+            <a:ext cx="374538" cy="374538"/>
           </a:xfrm>
           <a:prstGeom prst="ellipse">
             <a:avLst/>
@@ -2920,8 +3093,8 @@
         </p:nvSpPr>
         <p:spPr>
           <a:xfrm>
-            <a:off x="8296656" y="2939796"/>
-            <a:ext cx="310896" cy="310896"/>
+            <a:off x="8296656" y="2907975"/>
+            <a:ext cx="374538" cy="374538"/>
           </a:xfrm>
           <a:prstGeom prst="rect">
             <a:avLst/>
@@ -2940,7 +3113,7 @@
               <a:buNone/>
             </a:pPr>
             <a:r>
-              <a:rPr lang="en-US" sz="1100" b="1" dirty="0">
+              <a:rPr lang="en-US" sz="1500" b="1" dirty="0">
                 <a:solidFill>
                   <a:srgbClr val="F8FAFC"/>
                 </a:solidFill>
@@ -2950,7 +3123,7 @@
               </a:rPr>
               <a:t>3</a:t>
             </a:r>
-            <a:endParaRPr lang="en-US" sz="1100" dirty="0"/>
+            <a:endParaRPr lang="en-US" sz="1500" dirty="0"/>
           </a:p>
         </p:txBody>
       </p:sp>
@@ -2962,8 +3135,8 @@
         </p:nvSpPr>
         <p:spPr>
           <a:xfrm>
-            <a:off x="8753856" y="2638044"/>
-            <a:ext cx="2648712" cy="914400"/>
+            <a:off x="8817498" y="2638044"/>
+            <a:ext cx="2585070" cy="914400"/>
           </a:xfrm>
           <a:prstGeom prst="rect">
             <a:avLst/>
@@ -2984,7 +3157,7 @@
               <a:buNone/>
             </a:pPr>
             <a:r>
-              <a:rPr lang="en-US" sz="1500" dirty="0">
+              <a:rPr lang="en-US" sz="1600" dirty="0">
                 <a:solidFill>
                   <a:srgbClr val="0F172A"/>
                 </a:solidFill>
@@ -2994,7 +3167,7 @@
               </a:rPr>
               <a:t>Presentation IR</a:t>
             </a:r>
-            <a:endParaRPr lang="en-US" sz="1500" dirty="0"/>
+            <a:endParaRPr lang="en-US" sz="1600" dirty="0"/>
           </a:p>
         </p:txBody>
       </p:sp>
@@ -3067,8 +3240,8 @@
         </p:nvSpPr>
         <p:spPr>
           <a:xfrm>
-            <a:off x="8296656" y="4421124"/>
-            <a:ext cx="310896" cy="310896"/>
+            <a:off x="8296656" y="4389303"/>
+            <a:ext cx="374538" cy="374538"/>
           </a:xfrm>
           <a:prstGeom prst="ellipse">
             <a:avLst/>
@@ -3094,8 +3267,8 @@
         </p:nvSpPr>
         <p:spPr>
           <a:xfrm>
-            <a:off x="8296656" y="4421124"/>
-            <a:ext cx="310896" cy="310896"/>
+            <a:off x="8296656" y="4389303"/>
+            <a:ext cx="374538" cy="374538"/>
           </a:xfrm>
           <a:prstGeom prst="rect">
             <a:avLst/>
@@ -3114,7 +3287,7 @@
               <a:buNone/>
             </a:pPr>
             <a:r>
-              <a:rPr lang="en-US" sz="1100" b="1" dirty="0">
+              <a:rPr lang="en-US" sz="1500" b="1" dirty="0">
                 <a:solidFill>
                   <a:srgbClr val="F8FAFC"/>
                 </a:solidFill>
@@ -3124,7 +3297,7 @@
               </a:rPr>
               <a:t>4</a:t>
             </a:r>
-            <a:endParaRPr lang="en-US" sz="1100" dirty="0"/>
+            <a:endParaRPr lang="en-US" sz="1500" dirty="0"/>
           </a:p>
         </p:txBody>
       </p:sp>
@@ -3136,8 +3309,8 @@
         </p:nvSpPr>
         <p:spPr>
           <a:xfrm>
-            <a:off x="8753856" y="4119372"/>
-            <a:ext cx="2648712" cy="914400"/>
+            <a:off x="8817498" y="4119372"/>
+            <a:ext cx="2585070" cy="914400"/>
           </a:xfrm>
           <a:prstGeom prst="rect">
             <a:avLst/>
@@ -3158,7 +3331,7 @@
               <a:buNone/>
             </a:pPr>
             <a:r>
-              <a:rPr lang="en-US" sz="1500" dirty="0">
+              <a:rPr lang="en-US" sz="1600" dirty="0">
                 <a:solidFill>
                   <a:srgbClr val="0F172A"/>
                 </a:solidFill>
@@ -3168,7 +3341,7 @@
               </a:rPr>
               <a:t>Layout IR</a:t>
             </a:r>
-            <a:endParaRPr lang="en-US" sz="1500" dirty="0"/>
+            <a:endParaRPr lang="en-US" sz="1600" dirty="0"/>
           </a:p>
         </p:txBody>
       </p:sp>
@@ -3241,8 +3414,8 @@
         </p:nvSpPr>
         <p:spPr>
           <a:xfrm>
-            <a:off x="4550664" y="4421124"/>
-            <a:ext cx="310896" cy="310896"/>
+            <a:off x="4550664" y="4389303"/>
+            <a:ext cx="374538" cy="374538"/>
           </a:xfrm>
           <a:prstGeom prst="ellipse">
             <a:avLst/>
@@ -3268,8 +3441,8 @@
         </p:nvSpPr>
         <p:spPr>
           <a:xfrm>
-            <a:off x="4550664" y="4421124"/>
-            <a:ext cx="310896" cy="310896"/>
+            <a:off x="4550664" y="4389303"/>
+            <a:ext cx="374538" cy="374538"/>
           </a:xfrm>
           <a:prstGeom prst="rect">
             <a:avLst/>
@@ -3288,7 +3461,7 @@
               <a:buNone/>
             </a:pPr>
             <a:r>
-              <a:rPr lang="en-US" sz="1100" b="1" dirty="0">
+              <a:rPr lang="en-US" sz="1500" b="1" dirty="0">
                 <a:solidFill>
                   <a:srgbClr val="F8FAFC"/>
                 </a:solidFill>
@@ -3298,7 +3471,7 @@
               </a:rPr>
               <a:t>5</a:t>
             </a:r>
-            <a:endParaRPr lang="en-US" sz="1100" dirty="0"/>
+            <a:endParaRPr lang="en-US" sz="1500" dirty="0"/>
           </a:p>
         </p:txBody>
       </p:sp>
@@ -3310,8 +3483,8 @@
         </p:nvSpPr>
         <p:spPr>
           <a:xfrm>
-            <a:off x="5007864" y="4119372"/>
-            <a:ext cx="2648712" cy="914400"/>
+            <a:off x="5071506" y="4119372"/>
+            <a:ext cx="2585070" cy="914400"/>
           </a:xfrm>
           <a:prstGeom prst="rect">
             <a:avLst/>
@@ -3332,7 +3505,7 @@
               <a:buNone/>
             </a:pPr>
             <a:r>
-              <a:rPr lang="en-US" sz="1500" dirty="0">
+              <a:rPr lang="en-US" sz="1600" dirty="0">
                 <a:solidFill>
                   <a:srgbClr val="0F172A"/>
                 </a:solidFill>
@@ -3342,7 +3515,7 @@
               </a:rPr>
               <a:t>PPTX renderer</a:t>
             </a:r>
-            <a:endParaRPr lang="en-US" sz="1500" dirty="0"/>
+            <a:endParaRPr lang="en-US" sz="1600" dirty="0"/>
           </a:p>
         </p:txBody>
       </p:sp>
@@ -3415,8 +3588,8 @@
         </p:nvSpPr>
         <p:spPr>
           <a:xfrm>
-            <a:off x="804672" y="4421124"/>
-            <a:ext cx="310896" cy="310896"/>
+            <a:off x="804672" y="4389303"/>
+            <a:ext cx="374538" cy="374538"/>
           </a:xfrm>
           <a:prstGeom prst="ellipse">
             <a:avLst/>
@@ -3442,8 +3615,8 @@
         </p:nvSpPr>
         <p:spPr>
           <a:xfrm>
-            <a:off x="804672" y="4421124"/>
-            <a:ext cx="310896" cy="310896"/>
+            <a:off x="804672" y="4389303"/>
+            <a:ext cx="374538" cy="374538"/>
           </a:xfrm>
           <a:prstGeom prst="rect">
             <a:avLst/>
@@ -3462,7 +3635,7 @@
               <a:buNone/>
             </a:pPr>
             <a:r>
-              <a:rPr lang="en-US" sz="1100" b="1" dirty="0">
+              <a:rPr lang="en-US" sz="1500" b="1" dirty="0">
                 <a:solidFill>
                   <a:srgbClr val="F8FAFC"/>
                 </a:solidFill>
@@ -3472,7 +3645,7 @@
               </a:rPr>
               <a:t>6</a:t>
             </a:r>
-            <a:endParaRPr lang="en-US" sz="1100" dirty="0"/>
+            <a:endParaRPr lang="en-US" sz="1500" dirty="0"/>
           </a:p>
         </p:txBody>
       </p:sp>
@@ -3484,8 +3657,8 @@
         </p:nvSpPr>
         <p:spPr>
           <a:xfrm>
-            <a:off x="1261872" y="4119372"/>
-            <a:ext cx="2648712" cy="914400"/>
+            <a:off x="1325514" y="4119372"/>
+            <a:ext cx="2585070" cy="914400"/>
           </a:xfrm>
           <a:prstGeom prst="rect">
             <a:avLst/>
@@ -3506,7 +3679,7 @@
               <a:buNone/>
             </a:pPr>
             <a:r>
-              <a:rPr lang="en-US" sz="1500" dirty="0">
+              <a:rPr lang="en-US" sz="1600" dirty="0">
                 <a:solidFill>
                   <a:srgbClr val="0F172A"/>
                 </a:solidFill>
@@ -3516,7 +3689,7 @@
               </a:rPr>
               <a:t>visual QA.</a:t>
             </a:r>
-            <a:endParaRPr lang="en-US" sz="1500" dirty="0"/>
+            <a:endParaRPr lang="en-US" sz="1600" dirty="0"/>
           </a:p>
         </p:txBody>
       </p:sp>
@@ -3761,8 +3934,8 @@
         </p:nvSpPr>
         <p:spPr>
           <a:xfrm>
-            <a:off x="914400" y="1463040"/>
-            <a:ext cx="10241280" cy="73152"/>
+            <a:off x="822960" y="1572768"/>
+            <a:ext cx="6629400" cy="73152"/>
           </a:xfrm>
           <a:prstGeom prst="rect">
             <a:avLst/>
@@ -3782,7 +3955,180 @@
       </p:sp>
       <p:sp>
         <p:nvSpPr>
-          <p:cNvPr id="6" name="Text 4"/>
+          <p:cNvPr id="6" name="Shape 4"/>
+          <p:cNvSpPr/>
+          <p:nvPr/>
+        </p:nvSpPr>
+        <p:spPr>
+          <a:xfrm>
+            <a:off x="7955280" y="1993392"/>
+            <a:ext cx="2139696" cy="2139696"/>
+          </a:xfrm>
+          <a:prstGeom prst="roundRect">
+            <a:avLst>
+              <a:gd name="adj" fmla="val 3419"/>
+            </a:avLst>
+          </a:prstGeom>
+          <a:solidFill>
+            <a:srgbClr val="FBFCFD"/>
+          </a:solidFill>
+          <a:ln w="12700">
+            <a:solidFill>
+              <a:srgbClr val="BDCAE0"/>
+            </a:solidFill>
+            <a:prstDash val="solid"/>
+          </a:ln>
+          <a:effectLst>
+            <a:outerShdw sx="100000" sy="100000" kx="0" ky="0" algn="bl" rotWithShape="0" blurRad="12700" dist="50800" dir="2700000">
+              <a:srgbClr val="000000">
+                <a:alpha val="8000"/>
+              </a:srgbClr>
+            </a:outerShdw>
+          </a:effectLst>
+        </p:spPr>
+      </p:sp>
+      <p:sp>
+        <p:nvSpPr>
+          <p:cNvPr id="7" name="Shape 5"/>
+          <p:cNvSpPr/>
+          <p:nvPr/>
+        </p:nvSpPr>
+        <p:spPr>
+          <a:xfrm>
+            <a:off x="8511601" y="2464125"/>
+            <a:ext cx="575150" cy="742902"/>
+          </a:xfrm>
+          <a:prstGeom prst="roundRect">
+            <a:avLst>
+              <a:gd name="adj" fmla="val 6359"/>
+            </a:avLst>
+          </a:prstGeom>
+          <a:solidFill>
+            <a:srgbClr val="0F172A"/>
+          </a:solidFill>
+          <a:ln w="12700">
+            <a:solidFill>
+              <a:srgbClr val="0F172A">
+                <a:alpha val="0"/>
+              </a:srgbClr>
+            </a:solidFill>
+            <a:prstDash val="solid"/>
+          </a:ln>
+        </p:spPr>
+      </p:sp>
+      <p:sp>
+        <p:nvSpPr>
+          <p:cNvPr id="8" name="Shape 6"/>
+          <p:cNvSpPr/>
+          <p:nvPr/>
+        </p:nvSpPr>
+        <p:spPr>
+          <a:xfrm>
+            <a:off x="8655389" y="2655842"/>
+            <a:ext cx="299557" cy="41938"/>
+          </a:xfrm>
+          <a:prstGeom prst="rect">
+            <a:avLst/>
+          </a:prstGeom>
+          <a:solidFill>
+            <a:srgbClr val="FBFCFD"/>
+          </a:solidFill>
+          <a:ln w="12700">
+            <a:solidFill>
+              <a:srgbClr val="FBFCFD">
+                <a:alpha val="0"/>
+              </a:srgbClr>
+            </a:solidFill>
+            <a:prstDash val="solid"/>
+          </a:ln>
+        </p:spPr>
+      </p:sp>
+      <p:sp>
+        <p:nvSpPr>
+          <p:cNvPr id="9" name="Shape 7"/>
+          <p:cNvSpPr/>
+          <p:nvPr/>
+        </p:nvSpPr>
+        <p:spPr>
+          <a:xfrm>
+            <a:off x="8655389" y="2811612"/>
+            <a:ext cx="299557" cy="41938"/>
+          </a:xfrm>
+          <a:prstGeom prst="rect">
+            <a:avLst/>
+          </a:prstGeom>
+          <a:solidFill>
+            <a:srgbClr val="FBFCFD"/>
+          </a:solidFill>
+          <a:ln w="12700">
+            <a:solidFill>
+              <a:srgbClr val="FBFCFD">
+                <a:alpha val="0"/>
+              </a:srgbClr>
+            </a:solidFill>
+            <a:prstDash val="solid"/>
+          </a:ln>
+        </p:spPr>
+      </p:sp>
+      <p:sp>
+        <p:nvSpPr>
+          <p:cNvPr id="10" name="Shape 8"/>
+          <p:cNvSpPr/>
+          <p:nvPr/>
+        </p:nvSpPr>
+        <p:spPr>
+          <a:xfrm>
+            <a:off x="8655389" y="2967382"/>
+            <a:ext cx="299557" cy="41938"/>
+          </a:xfrm>
+          <a:prstGeom prst="rect">
+            <a:avLst/>
+          </a:prstGeom>
+          <a:solidFill>
+            <a:srgbClr val="FBFCFD"/>
+          </a:solidFill>
+          <a:ln w="12700">
+            <a:solidFill>
+              <a:srgbClr val="FBFCFD">
+                <a:alpha val="0"/>
+              </a:srgbClr>
+            </a:solidFill>
+            <a:prstDash val="solid"/>
+          </a:ln>
+        </p:spPr>
+      </p:sp>
+      <p:sp>
+        <p:nvSpPr>
+          <p:cNvPr id="11" name="Shape 9"/>
+          <p:cNvSpPr/>
+          <p:nvPr/>
+        </p:nvSpPr>
+        <p:spPr>
+          <a:xfrm>
+            <a:off x="822960" y="1572768"/>
+            <a:ext cx="6629400" cy="3310128"/>
+          </a:xfrm>
+          <a:prstGeom prst="roundRect">
+            <a:avLst>
+              <a:gd name="adj" fmla="val 1657"/>
+            </a:avLst>
+          </a:prstGeom>
+          <a:solidFill>
+            <a:srgbClr val="FBFCFD"/>
+          </a:solidFill>
+          <a:ln w="12700">
+            <a:solidFill>
+              <a:srgbClr val="BDCAE0">
+                <a:alpha val="90000"/>
+              </a:srgbClr>
+            </a:solidFill>
+            <a:prstDash val="solid"/>
+          </a:ln>
+        </p:spPr>
+      </p:sp>
+      <p:sp>
+        <p:nvSpPr>
+          <p:cNvPr id="12" name="Text 10"/>
           <p:cNvSpPr txBox="1"/>
           <p:nvPr/>
         </p:nvSpPr>
@@ -3826,14 +4172,14 @@
       </p:sp>
       <p:sp>
         <p:nvSpPr>
-          <p:cNvPr id="7" name="Text 5"/>
+          <p:cNvPr id="13" name="Text 11"/>
           <p:cNvSpPr txBox="1"/>
           <p:nvPr/>
         </p:nvSpPr>
         <p:spPr>
           <a:xfrm>
-            <a:off x="987552" y="1572768"/>
-            <a:ext cx="10094976" cy="4261104"/>
+            <a:off x="1115568" y="1773936"/>
+            <a:ext cx="6044184" cy="2907792"/>
           </a:xfrm>
           <a:prstGeom prst="rect">
             <a:avLst/>
@@ -3842,7 +4188,7 @@
           <a:ln/>
         </p:spPr>
         <p:txBody>
-          <a:bodyPr wrap="square" lIns="0" tIns="25400" rIns="25400" bIns="0" rtlCol="0" anchor="t">
+          <a:bodyPr wrap="square" lIns="0" tIns="25400" rIns="25400" bIns="0" rtlCol="0" anchor="ctr">
             <a:normAutofit/>
           </a:bodyPr>
           <a:lstStyle/>
